--- a/PCB.pptx
+++ b/PCB.pptx
@@ -115,6 +115,11 @@
       </a:defRPr>
     </a:lvl9pPr>
   </p:defaultTextStyle>
+  <p:extLst>
+    <p:ext uri="{EFAFB233-063F-42B5-8137-9DF3F51BA10A}">
+      <p15:sldGuideLst xmlns:p15="http://schemas.microsoft.com/office/powerpoint/2012/main"/>
+    </p:ext>
+  </p:extLst>
 </p:presentation>
 </file>
 
@@ -12509,10 +12514,10 @@
       </p:sp>
       <p:pic>
         <p:nvPicPr>
-          <p:cNvPr id="7" name="Slika 6">
+          <p:cNvPr id="4" name="Slika 3">
             <a:extLst>
               <a:ext uri="{FF2B5EF4-FFF2-40B4-BE49-F238E27FC236}">
-                <a16:creationId xmlns:a16="http://schemas.microsoft.com/office/drawing/2014/main" id="{AD9D6821-2E2A-975B-5BB5-0FCEE235752D}"/>
+                <a16:creationId xmlns:a16="http://schemas.microsoft.com/office/drawing/2014/main" id="{129C357E-22B2-91DD-21B7-129D4F787748}"/>
               </a:ext>
             </a:extLst>
           </p:cNvPr>
@@ -12529,8 +12534,8 @@
         </p:blipFill>
         <p:spPr>
           <a:xfrm>
-            <a:off x="5852108" y="1066799"/>
-            <a:ext cx="4831443" cy="4808545"/>
+            <a:off x="6094411" y="1066799"/>
+            <a:ext cx="4990124" cy="4779274"/>
           </a:xfrm>
           <a:prstGeom prst="rect">
             <a:avLst/>
@@ -12623,10 +12628,10 @@
       </p:sp>
       <p:pic>
         <p:nvPicPr>
-          <p:cNvPr id="7" name="Slika 6">
+          <p:cNvPr id="4" name="Slika 3">
             <a:extLst>
               <a:ext uri="{FF2B5EF4-FFF2-40B4-BE49-F238E27FC236}">
-                <a16:creationId xmlns:a16="http://schemas.microsoft.com/office/drawing/2014/main" id="{7AC22E71-74B0-A210-EE9D-8FC28C699AED}"/>
+                <a16:creationId xmlns:a16="http://schemas.microsoft.com/office/drawing/2014/main" id="{B21DB80B-8ACF-F8F5-6E08-62FA653D1BF0}"/>
               </a:ext>
             </a:extLst>
           </p:cNvPr>
@@ -12643,8 +12648,8 @@
         </p:blipFill>
         <p:spPr>
           <a:xfrm>
-            <a:off x="5980194" y="1066799"/>
-            <a:ext cx="4895036" cy="4590489"/>
+            <a:off x="6096000" y="946891"/>
+            <a:ext cx="5066492" cy="4964218"/>
           </a:xfrm>
           <a:prstGeom prst="rect">
             <a:avLst/>
@@ -15759,36 +15764,6 @@
           </a:p>
         </p:txBody>
       </p:sp>
-      <p:pic>
-        <p:nvPicPr>
-          <p:cNvPr id="5" name="Slika 4">
-            <a:extLst>
-              <a:ext uri="{FF2B5EF4-FFF2-40B4-BE49-F238E27FC236}">
-                <a16:creationId xmlns:a16="http://schemas.microsoft.com/office/drawing/2014/main" id="{397BC82C-C91A-25A7-6BDE-4D2C92084B77}"/>
-              </a:ext>
-            </a:extLst>
-          </p:cNvPr>
-          <p:cNvPicPr>
-            <a:picLocks noChangeAspect="1"/>
-          </p:cNvPicPr>
-          <p:nvPr/>
-        </p:nvPicPr>
-        <p:blipFill>
-          <a:blip r:embed="rId2"/>
-          <a:stretch>
-            <a:fillRect/>
-          </a:stretch>
-        </p:blipFill>
-        <p:spPr>
-          <a:xfrm>
-            <a:off x="5861438" y="898135"/>
-            <a:ext cx="5102031" cy="5061730"/>
-          </a:xfrm>
-          <a:prstGeom prst="rect">
-            <a:avLst/>
-          </a:prstGeom>
-        </p:spPr>
-      </p:pic>
       <p:sp>
         <p:nvSpPr>
           <p:cNvPr id="7" name="Rezervirano mjesto sadržaja 6">
@@ -15814,6 +15789,36 @@
           </a:p>
         </p:txBody>
       </p:sp>
+      <p:pic>
+        <p:nvPicPr>
+          <p:cNvPr id="4" name="Slika 3">
+            <a:extLst>
+              <a:ext uri="{FF2B5EF4-FFF2-40B4-BE49-F238E27FC236}">
+                <a16:creationId xmlns:a16="http://schemas.microsoft.com/office/drawing/2014/main" id="{929310C6-B63B-4F1C-1828-5C0C35253226}"/>
+              </a:ext>
+            </a:extLst>
+          </p:cNvPr>
+          <p:cNvPicPr>
+            <a:picLocks noChangeAspect="1"/>
+          </p:cNvPicPr>
+          <p:nvPr/>
+        </p:nvPicPr>
+        <p:blipFill>
+          <a:blip r:embed="rId2"/>
+          <a:stretch>
+            <a:fillRect/>
+          </a:stretch>
+        </p:blipFill>
+        <p:spPr>
+          <a:xfrm>
+            <a:off x="5684600" y="1066799"/>
+            <a:ext cx="5362811" cy="4919730"/>
+          </a:xfrm>
+          <a:prstGeom prst="rect">
+            <a:avLst/>
+          </a:prstGeom>
+        </p:spPr>
+      </p:pic>
     </p:spTree>
     <p:extLst>
       <p:ext uri="{BB962C8B-B14F-4D97-AF65-F5344CB8AC3E}">
@@ -15873,36 +15878,6 @@
           </a:p>
         </p:txBody>
       </p:sp>
-      <p:pic>
-        <p:nvPicPr>
-          <p:cNvPr id="5" name="Slika 4">
-            <a:extLst>
-              <a:ext uri="{FF2B5EF4-FFF2-40B4-BE49-F238E27FC236}">
-                <a16:creationId xmlns:a16="http://schemas.microsoft.com/office/drawing/2014/main" id="{5025A86F-30D3-9A8E-D8C8-C2A56132BDEF}"/>
-              </a:ext>
-            </a:extLst>
-          </p:cNvPr>
-          <p:cNvPicPr>
-            <a:picLocks noChangeAspect="1"/>
-          </p:cNvPicPr>
-          <p:nvPr/>
-        </p:nvPicPr>
-        <p:blipFill>
-          <a:blip r:embed="rId2"/>
-          <a:stretch>
-            <a:fillRect/>
-          </a:stretch>
-        </p:blipFill>
-        <p:spPr>
-          <a:xfrm>
-            <a:off x="6197757" y="1066799"/>
-            <a:ext cx="4430886" cy="4310743"/>
-          </a:xfrm>
-          <a:prstGeom prst="rect">
-            <a:avLst/>
-          </a:prstGeom>
-        </p:spPr>
-      </p:pic>
       <p:sp>
         <p:nvSpPr>
           <p:cNvPr id="7" name="Rezervirano mjesto sadržaja 6">
@@ -15928,6 +15903,36 @@
           </a:p>
         </p:txBody>
       </p:sp>
+      <p:pic>
+        <p:nvPicPr>
+          <p:cNvPr id="4" name="Slika 3">
+            <a:extLst>
+              <a:ext uri="{FF2B5EF4-FFF2-40B4-BE49-F238E27FC236}">
+                <a16:creationId xmlns:a16="http://schemas.microsoft.com/office/drawing/2014/main" id="{F9BF96A3-0580-00A4-5127-5D4CB32559FA}"/>
+              </a:ext>
+            </a:extLst>
+          </p:cNvPr>
+          <p:cNvPicPr>
+            <a:picLocks noChangeAspect="1"/>
+          </p:cNvPicPr>
+          <p:nvPr/>
+        </p:nvPicPr>
+        <p:blipFill>
+          <a:blip r:embed="rId2"/>
+          <a:stretch>
+            <a:fillRect/>
+          </a:stretch>
+        </p:blipFill>
+        <p:spPr>
+          <a:xfrm>
+            <a:off x="5943396" y="883937"/>
+            <a:ext cx="5322955" cy="5090126"/>
+          </a:xfrm>
+          <a:prstGeom prst="rect">
+            <a:avLst/>
+          </a:prstGeom>
+        </p:spPr>
+      </p:pic>
     </p:spTree>
     <p:extLst>
       <p:ext uri="{BB962C8B-B14F-4D97-AF65-F5344CB8AC3E}">
@@ -15987,36 +15992,6 @@
           </a:p>
         </p:txBody>
       </p:sp>
-      <p:pic>
-        <p:nvPicPr>
-          <p:cNvPr id="5" name="Slika 4">
-            <a:extLst>
-              <a:ext uri="{FF2B5EF4-FFF2-40B4-BE49-F238E27FC236}">
-                <a16:creationId xmlns:a16="http://schemas.microsoft.com/office/drawing/2014/main" id="{3B0C22A2-F3B5-0BB0-52A5-9F74EDD3C36C}"/>
-              </a:ext>
-            </a:extLst>
-          </p:cNvPr>
-          <p:cNvPicPr>
-            <a:picLocks noChangeAspect="1"/>
-          </p:cNvPicPr>
-          <p:nvPr/>
-        </p:nvPicPr>
-        <p:blipFill>
-          <a:blip r:embed="rId2"/>
-          <a:stretch>
-            <a:fillRect/>
-          </a:stretch>
-        </p:blipFill>
-        <p:spPr>
-          <a:xfrm>
-            <a:off x="5746927" y="941793"/>
-            <a:ext cx="5186928" cy="4974414"/>
-          </a:xfrm>
-          <a:prstGeom prst="rect">
-            <a:avLst/>
-          </a:prstGeom>
-        </p:spPr>
-      </p:pic>
       <p:sp>
         <p:nvSpPr>
           <p:cNvPr id="7" name="Rezervirano mjesto sadržaja 6">
@@ -16042,6 +16017,36 @@
           </a:p>
         </p:txBody>
       </p:sp>
+      <p:pic>
+        <p:nvPicPr>
+          <p:cNvPr id="4" name="Slika 3">
+            <a:extLst>
+              <a:ext uri="{FF2B5EF4-FFF2-40B4-BE49-F238E27FC236}">
+                <a16:creationId xmlns:a16="http://schemas.microsoft.com/office/drawing/2014/main" id="{42C72735-0C6B-E71E-48DE-4DAD0D4C2937}"/>
+              </a:ext>
+            </a:extLst>
+          </p:cNvPr>
+          <p:cNvPicPr>
+            <a:picLocks noChangeAspect="1"/>
+          </p:cNvPicPr>
+          <p:nvPr/>
+        </p:nvPicPr>
+        <p:blipFill>
+          <a:blip r:embed="rId2"/>
+          <a:stretch>
+            <a:fillRect/>
+          </a:stretch>
+        </p:blipFill>
+        <p:spPr>
+          <a:xfrm>
+            <a:off x="6094219" y="1348144"/>
+            <a:ext cx="4953192" cy="4609618"/>
+          </a:xfrm>
+          <a:prstGeom prst="rect">
+            <a:avLst/>
+          </a:prstGeom>
+        </p:spPr>
+      </p:pic>
     </p:spTree>
     <p:extLst>
       <p:ext uri="{BB962C8B-B14F-4D97-AF65-F5344CB8AC3E}">
@@ -16101,36 +16106,6 @@
           </a:p>
         </p:txBody>
       </p:sp>
-      <p:pic>
-        <p:nvPicPr>
-          <p:cNvPr id="5" name="Slika 4">
-            <a:extLst>
-              <a:ext uri="{FF2B5EF4-FFF2-40B4-BE49-F238E27FC236}">
-                <a16:creationId xmlns:a16="http://schemas.microsoft.com/office/drawing/2014/main" id="{B8E47770-1E5B-15D5-92B8-BAA680D0E5B3}"/>
-              </a:ext>
-            </a:extLst>
-          </p:cNvPr>
-          <p:cNvPicPr>
-            <a:picLocks noChangeAspect="1"/>
-          </p:cNvPicPr>
-          <p:nvPr/>
-        </p:nvPicPr>
-        <p:blipFill>
-          <a:blip r:embed="rId2"/>
-          <a:stretch>
-            <a:fillRect/>
-          </a:stretch>
-        </p:blipFill>
-        <p:spPr>
-          <a:xfrm>
-            <a:off x="5540088" y="1066799"/>
-            <a:ext cx="5423381" cy="5150203"/>
-          </a:xfrm>
-          <a:prstGeom prst="rect">
-            <a:avLst/>
-          </a:prstGeom>
-        </p:spPr>
-      </p:pic>
       <p:sp>
         <p:nvSpPr>
           <p:cNvPr id="7" name="Rezervirano mjesto sadržaja 6">
@@ -16156,6 +16131,36 @@
           </a:p>
         </p:txBody>
       </p:sp>
+      <p:pic>
+        <p:nvPicPr>
+          <p:cNvPr id="4" name="Slika 3">
+            <a:extLst>
+              <a:ext uri="{FF2B5EF4-FFF2-40B4-BE49-F238E27FC236}">
+                <a16:creationId xmlns:a16="http://schemas.microsoft.com/office/drawing/2014/main" id="{977C6BA6-4EB1-9E45-779B-2A63BD0B555B}"/>
+              </a:ext>
+            </a:extLst>
+          </p:cNvPr>
+          <p:cNvPicPr>
+            <a:picLocks noChangeAspect="1"/>
+          </p:cNvPicPr>
+          <p:nvPr/>
+        </p:nvPicPr>
+        <p:blipFill>
+          <a:blip r:embed="rId2"/>
+          <a:stretch>
+            <a:fillRect/>
+          </a:stretch>
+        </p:blipFill>
+        <p:spPr>
+          <a:xfrm>
+            <a:off x="6094411" y="1311184"/>
+            <a:ext cx="5066187" cy="4480017"/>
+          </a:xfrm>
+          <a:prstGeom prst="rect">
+            <a:avLst/>
+          </a:prstGeom>
+        </p:spPr>
+      </p:pic>
     </p:spTree>
     <p:extLst>
       <p:ext uri="{BB962C8B-B14F-4D97-AF65-F5344CB8AC3E}">
@@ -16242,10 +16247,10 @@
       </p:sp>
       <p:pic>
         <p:nvPicPr>
-          <p:cNvPr id="7" name="Slika 6">
+          <p:cNvPr id="4" name="Slika 3">
             <a:extLst>
               <a:ext uri="{FF2B5EF4-FFF2-40B4-BE49-F238E27FC236}">
-                <a16:creationId xmlns:a16="http://schemas.microsoft.com/office/drawing/2014/main" id="{50E6550B-5CEE-9E3F-CEC5-4F88AA341678}"/>
+                <a16:creationId xmlns:a16="http://schemas.microsoft.com/office/drawing/2014/main" id="{5BF41B1C-F60D-5399-92AE-AAE145B55F40}"/>
               </a:ext>
             </a:extLst>
           </p:cNvPr>
@@ -16262,8 +16267,8 @@
         </p:blipFill>
         <p:spPr>
           <a:xfrm>
-            <a:off x="5849564" y="1071464"/>
-            <a:ext cx="5024515" cy="4811030"/>
+            <a:off x="5844551" y="925221"/>
+            <a:ext cx="5202860" cy="5007558"/>
           </a:xfrm>
           <a:prstGeom prst="rect">
             <a:avLst/>
